--- a/CoraAiVault_Tokenomics_v3.pptx
+++ b/CoraAiVault_Tokenomics_v3.pptx
@@ -4068,7 +4068,7 @@
                 <a:ea typeface="Arial" pitchFamily="34" charset="-122"/>
                 <a:cs typeface="Arial" pitchFamily="34" charset="-120"/>
               </a:rPr>
-              <a:t>5,000,000,000</a:t>
+              <a:t>1,000,000,000</a:t>
             </a:r>
             <a:endParaRPr lang="en-US" sz="1400" dirty="0"/>
           </a:p>
@@ -4688,7 +4688,7 @@
                 <a:ea typeface="Arial" pitchFamily="34" charset="-122"/>
                 <a:cs typeface="Arial" pitchFamily="34" charset="-120"/>
               </a:rPr>
-              <a:t>Where the 5 billion go.</a:t>
+              <a:t>Where the 1 billion go.</a:t>
             </a:r>
             <a:endParaRPr lang="en-US" sz="3000" dirty="0"/>
           </a:p>
@@ -4846,7 +4846,7 @@
                 <a:ea typeface="Arial" pitchFamily="34" charset="-122"/>
                 <a:cs typeface="Arial" pitchFamily="34" charset="-120"/>
               </a:rPr>
-              <a:t>1,500,000,000 CRVT</a:t>
+              <a:t>300,000,000 CRVT</a:t>
             </a:r>
             <a:endParaRPr lang="en-US" sz="750" dirty="0"/>
           </a:p>
@@ -4988,7 +4988,7 @@
                 <a:ea typeface="Arial" pitchFamily="34" charset="-122"/>
                 <a:cs typeface="Arial" pitchFamily="34" charset="-120"/>
               </a:rPr>
-              <a:t>1,000,000,000 CRVT</a:t>
+              <a:t>200,000,000 CRVT</a:t>
             </a:r>
             <a:endParaRPr lang="en-US" sz="750" dirty="0"/>
           </a:p>
@@ -5130,7 +5130,7 @@
                 <a:ea typeface="Arial" pitchFamily="34" charset="-122"/>
                 <a:cs typeface="Arial" pitchFamily="34" charset="-120"/>
               </a:rPr>
-              <a:t>750,000,000 CRVT</a:t>
+              <a:t>150,000,000 CRVT</a:t>
             </a:r>
             <a:endParaRPr lang="en-US" sz="750" dirty="0"/>
           </a:p>
@@ -5272,7 +5272,7 @@
                 <a:ea typeface="Arial" pitchFamily="34" charset="-122"/>
                 <a:cs typeface="Arial" pitchFamily="34" charset="-120"/>
               </a:rPr>
-              <a:t>500,000,000 CRVT</a:t>
+              <a:t>100,000,000 CRVT</a:t>
             </a:r>
             <a:endParaRPr lang="en-US" sz="750" dirty="0"/>
           </a:p>
@@ -5414,7 +5414,7 @@
                 <a:ea typeface="Arial" pitchFamily="34" charset="-122"/>
                 <a:cs typeface="Arial" pitchFamily="34" charset="-120"/>
               </a:rPr>
-              <a:t>500,000,000 CRVT</a:t>
+              <a:t>100,000,000 CRVT</a:t>
             </a:r>
             <a:endParaRPr lang="en-US" sz="750" dirty="0"/>
           </a:p>
@@ -5556,7 +5556,7 @@
                 <a:ea typeface="Arial" pitchFamily="34" charset="-122"/>
                 <a:cs typeface="Arial" pitchFamily="34" charset="-120"/>
               </a:rPr>
-              <a:t>500,000,000 CRVT</a:t>
+              <a:t>100,000,000 CRVT</a:t>
             </a:r>
             <a:endParaRPr lang="en-US" sz="750" dirty="0"/>
           </a:p>
@@ -5698,7 +5698,7 @@
                 <a:ea typeface="Arial" pitchFamily="34" charset="-122"/>
                 <a:cs typeface="Arial" pitchFamily="34" charset="-120"/>
               </a:rPr>
-              <a:t>250,000,000 CRVT</a:t>
+              <a:t>50,000,000 CRVT</a:t>
             </a:r>
             <a:endParaRPr lang="en-US" sz="750" dirty="0"/>
           </a:p>
@@ -10393,7 +10393,7 @@
                 <a:ea typeface="Arial" pitchFamily="34" charset="-122"/>
                 <a:cs typeface="Arial" pitchFamily="34" charset="-120"/>
               </a:rPr>
-              <a:t>$CRVT · 5,000,000,000 Supply · BNB Smart Chain · BSC Mainnet</a:t>
+              <a:t>$CRVT · 1,000,000,000 Supply · BNB Smart Chain · BSC Mainnet</a:t>
             </a:r>
             <a:endParaRPr lang="en-US" sz="900" dirty="0"/>
           </a:p>
